--- a/03-课件PPT/讲次版/第4章-5-讲次 4-5 · LLM Wiki 与 Codebase.pptx
+++ b/03-课件PPT/讲次版/第4章-5-讲次 4-5 · LLM Wiki 与 Codebase.pptx
@@ -8329,7 +8329,7 @@
                 </a:solidFill>
                 <a:latin typeface="PingFang SC"/>
               </a:rPr>
-              <a:t>查询时双路并发|引用到 文件:行号</a:t>
+              <a:t>查询时双路并发</a:t>
             </a:r>
           </a:p>
         </p:txBody>
@@ -10758,21 +10758,391 @@
                 </a:solidFill>
                 <a:latin typeface="PingFang SC"/>
               </a:rPr>
-              <a:t>检索+引用输出实测,Q: 该项目的鉴权链路是怎样的?;检索: auth.py(3 命中) middleware.py(2);回答: 入口 middleware 拦截 → auth.py 校验;引用: src/auth.py:42-58, middleware.py:11;# 文件+行号引用是交付标准</a:t>
-            </a:r>
-          </a:p>
-        </p:txBody>
-      </p:sp>
-      <p:sp>
-        <p:nvSpPr>
-          <p:cNvPr id="5" name="TextBox 4"/>
+              <a:t>检索+引用输出实测</a:t>
+            </a:r>
+          </a:p>
+        </p:txBody>
+      </p:sp>
+      <p:sp>
+        <p:nvSpPr>
+          <p:cNvPr id="5" name="Rounded Rectangle 4"/>
+          <p:cNvSpPr/>
+          <p:nvPr/>
+        </p:nvSpPr>
+        <p:spPr>
+          <a:xfrm>
+            <a:off x="1333500" y="1047750"/>
+            <a:ext cx="9525000" cy="2667000"/>
+          </a:xfrm>
+          <a:prstGeom prst="roundRect">
+            <a:avLst>
+              <a:gd name="adj" fmla="val 8000"/>
+            </a:avLst>
+          </a:prstGeom>
+          <a:solidFill>
+            <a:srgbClr val="0D1117"/>
+          </a:solidFill>
+          <a:ln>
+            <a:noFill/>
+          </a:ln>
+          <a:effectLst/>
+        </p:spPr>
+        <p:style>
+          <a:lnRef idx="1">
+            <a:schemeClr val="accent1"/>
+          </a:lnRef>
+          <a:fillRef idx="3">
+            <a:schemeClr val="accent1"/>
+          </a:fillRef>
+          <a:effectRef idx="2">
+            <a:schemeClr val="accent1"/>
+          </a:effectRef>
+          <a:fontRef idx="minor">
+            <a:schemeClr val="lt1"/>
+          </a:fontRef>
+        </p:style>
+        <p:txBody>
+          <a:bodyPr rtlCol="0" anchor="ctr"/>
+          <a:lstStyle/>
+          <a:p>
+            <a:pPr algn="ctr"/>
+          </a:p>
+        </p:txBody>
+      </p:sp>
+      <p:sp>
+        <p:nvSpPr>
+          <p:cNvPr id="6" name="Rectangle 5"/>
+          <p:cNvSpPr/>
+          <p:nvPr/>
+        </p:nvSpPr>
+        <p:spPr>
+          <a:xfrm>
+            <a:off x="1333500" y="1047750"/>
+            <a:ext cx="9525000" cy="381000"/>
+          </a:xfrm>
+          <a:prstGeom prst="rect">
+            <a:avLst/>
+          </a:prstGeom>
+          <a:solidFill>
+            <a:srgbClr val="1F2937"/>
+          </a:solidFill>
+          <a:ln>
+            <a:noFill/>
+          </a:ln>
+          <a:effectLst/>
+        </p:spPr>
+        <p:style>
+          <a:lnRef idx="1">
+            <a:schemeClr val="accent1"/>
+          </a:lnRef>
+          <a:fillRef idx="3">
+            <a:schemeClr val="accent1"/>
+          </a:fillRef>
+          <a:effectRef idx="2">
+            <a:schemeClr val="accent1"/>
+          </a:effectRef>
+          <a:fontRef idx="minor">
+            <a:schemeClr val="lt1"/>
+          </a:fontRef>
+        </p:style>
+        <p:txBody>
+          <a:bodyPr rtlCol="0" anchor="ctr"/>
+          <a:lstStyle/>
+          <a:p>
+            <a:pPr algn="ctr"/>
+          </a:p>
+        </p:txBody>
+      </p:sp>
+      <p:sp>
+        <p:nvSpPr>
+          <p:cNvPr id="7" name="Rounded Rectangle 6"/>
+          <p:cNvSpPr/>
+          <p:nvPr/>
+        </p:nvSpPr>
+        <p:spPr>
+          <a:xfrm>
+            <a:off x="1504950" y="1181100"/>
+            <a:ext cx="123825" cy="123825"/>
+          </a:xfrm>
+          <a:prstGeom prst="roundRect">
+            <a:avLst>
+              <a:gd name="adj" fmla="val 8000"/>
+            </a:avLst>
+          </a:prstGeom>
+          <a:solidFill>
+            <a:srgbClr val="F87171"/>
+          </a:solidFill>
+          <a:ln>
+            <a:noFill/>
+          </a:ln>
+          <a:effectLst/>
+        </p:spPr>
+        <p:style>
+          <a:lnRef idx="1">
+            <a:schemeClr val="accent1"/>
+          </a:lnRef>
+          <a:fillRef idx="3">
+            <a:schemeClr val="accent1"/>
+          </a:fillRef>
+          <a:effectRef idx="2">
+            <a:schemeClr val="accent1"/>
+          </a:effectRef>
+          <a:fontRef idx="minor">
+            <a:schemeClr val="lt1"/>
+          </a:fontRef>
+        </p:style>
+        <p:txBody>
+          <a:bodyPr rtlCol="0" anchor="ctr"/>
+          <a:lstStyle/>
+          <a:p>
+            <a:pPr algn="ctr"/>
+          </a:p>
+        </p:txBody>
+      </p:sp>
+      <p:sp>
+        <p:nvSpPr>
+          <p:cNvPr id="8" name="Rounded Rectangle 7"/>
+          <p:cNvSpPr/>
+          <p:nvPr/>
+        </p:nvSpPr>
+        <p:spPr>
+          <a:xfrm>
+            <a:off x="1752600" y="1181100"/>
+            <a:ext cx="123825" cy="123825"/>
+          </a:xfrm>
+          <a:prstGeom prst="roundRect">
+            <a:avLst>
+              <a:gd name="adj" fmla="val 8000"/>
+            </a:avLst>
+          </a:prstGeom>
+          <a:solidFill>
+            <a:srgbClr val="F59E0B"/>
+          </a:solidFill>
+          <a:ln>
+            <a:noFill/>
+          </a:ln>
+          <a:effectLst/>
+        </p:spPr>
+        <p:style>
+          <a:lnRef idx="1">
+            <a:schemeClr val="accent1"/>
+          </a:lnRef>
+          <a:fillRef idx="3">
+            <a:schemeClr val="accent1"/>
+          </a:fillRef>
+          <a:effectRef idx="2">
+            <a:schemeClr val="accent1"/>
+          </a:effectRef>
+          <a:fontRef idx="minor">
+            <a:schemeClr val="lt1"/>
+          </a:fontRef>
+        </p:style>
+        <p:txBody>
+          <a:bodyPr rtlCol="0" anchor="ctr"/>
+          <a:lstStyle/>
+          <a:p>
+            <a:pPr algn="ctr"/>
+          </a:p>
+        </p:txBody>
+      </p:sp>
+      <p:sp>
+        <p:nvSpPr>
+          <p:cNvPr id="9" name="Rounded Rectangle 8"/>
+          <p:cNvSpPr/>
+          <p:nvPr/>
+        </p:nvSpPr>
+        <p:spPr>
+          <a:xfrm>
+            <a:off x="2000250" y="1181100"/>
+            <a:ext cx="123825" cy="123825"/>
+          </a:xfrm>
+          <a:prstGeom prst="roundRect">
+            <a:avLst>
+              <a:gd name="adj" fmla="val 8000"/>
+            </a:avLst>
+          </a:prstGeom>
+          <a:solidFill>
+            <a:srgbClr val="34D399"/>
+          </a:solidFill>
+          <a:ln>
+            <a:noFill/>
+          </a:ln>
+          <a:effectLst/>
+        </p:spPr>
+        <p:style>
+          <a:lnRef idx="1">
+            <a:schemeClr val="accent1"/>
+          </a:lnRef>
+          <a:fillRef idx="3">
+            <a:schemeClr val="accent1"/>
+          </a:fillRef>
+          <a:effectRef idx="2">
+            <a:schemeClr val="accent1"/>
+          </a:effectRef>
+          <a:fontRef idx="minor">
+            <a:schemeClr val="lt1"/>
+          </a:fontRef>
+        </p:style>
+        <p:txBody>
+          <a:bodyPr rtlCol="0" anchor="ctr"/>
+          <a:lstStyle/>
+          <a:p>
+            <a:pPr algn="ctr"/>
+          </a:p>
+        </p:txBody>
+      </p:sp>
+      <p:sp>
+        <p:nvSpPr>
+          <p:cNvPr id="10" name="TextBox 9"/>
           <p:cNvSpPr txBox="1"/>
           <p:nvPr/>
         </p:nvSpPr>
         <p:spPr>
           <a:xfrm>
-            <a:off x="9334500" y="0"/>
-            <a:ext cx="2667000" cy="704850"/>
+            <a:off x="2381250" y="1047750"/>
+            <a:ext cx="8286750" cy="381000"/>
+          </a:xfrm>
+          <a:prstGeom prst="rect">
+            <a:avLst/>
+          </a:prstGeom>
+          <a:noFill/>
+        </p:spPr>
+        <p:txBody>
+          <a:bodyPr wrap="square" anchor="ctr">
+            <a:spAutoFit/>
+          </a:bodyPr>
+          <a:lstStyle/>
+          <a:p>
+            <a:pPr algn="l">
+              <a:lnSpc>
+                <a:spcPct val="100000"/>
+              </a:lnSpc>
+            </a:pPr>
+            <a:r>
+              <a:rPr sz="1100" b="0">
+                <a:solidFill>
+                  <a:srgbClr val="94A3B8"/>
+                </a:solidFill>
+                <a:latin typeface="PingFang SC"/>
+              </a:rPr>
+              <a:t>terminal — 平台实测</a:t>
+            </a:r>
+          </a:p>
+        </p:txBody>
+      </p:sp>
+      <p:sp>
+        <p:nvSpPr>
+          <p:cNvPr id="11" name="TextBox 10"/>
+          <p:cNvSpPr txBox="1"/>
+          <p:nvPr/>
+        </p:nvSpPr>
+        <p:spPr>
+          <a:xfrm>
+            <a:off x="1562100" y="1581150"/>
+            <a:ext cx="9067800" cy="2000250"/>
+          </a:xfrm>
+          <a:prstGeom prst="rect">
+            <a:avLst/>
+          </a:prstGeom>
+          <a:noFill/>
+        </p:spPr>
+        <p:txBody>
+          <a:bodyPr wrap="square">
+            <a:spAutoFit/>
+          </a:bodyPr>
+          <a:lstStyle/>
+          <a:p>
+            <a:pPr>
+              <a:lnSpc>
+                <a:spcPct val="115000"/>
+              </a:lnSpc>
+            </a:pPr>
+            <a:r>
+              <a:rPr sz="1300">
+                <a:solidFill>
+                  <a:srgbClr val="CBD5E1"/>
+                </a:solidFill>
+                <a:latin typeface="Menlo"/>
+              </a:rPr>
+              <a:t>Q: 该项目的鉴权链路是怎样的?</a:t>
+            </a:r>
+          </a:p>
+          <a:p>
+            <a:pPr>
+              <a:lnSpc>
+                <a:spcPct val="115000"/>
+              </a:lnSpc>
+            </a:pPr>
+            <a:r>
+              <a:rPr sz="1300">
+                <a:solidFill>
+                  <a:srgbClr val="CBD5E1"/>
+                </a:solidFill>
+                <a:latin typeface="Menlo"/>
+              </a:rPr>
+              <a:t>检索: auth.py(3 命中) middleware.py(2)</a:t>
+            </a:r>
+          </a:p>
+          <a:p>
+            <a:pPr>
+              <a:lnSpc>
+                <a:spcPct val="115000"/>
+              </a:lnSpc>
+            </a:pPr>
+            <a:r>
+              <a:rPr sz="1300">
+                <a:solidFill>
+                  <a:srgbClr val="CBD5E1"/>
+                </a:solidFill>
+                <a:latin typeface="Menlo"/>
+              </a:rPr>
+              <a:t>回答: 入口 middleware 拦截 → auth.py 校验</a:t>
+            </a:r>
+          </a:p>
+          <a:p>
+            <a:pPr>
+              <a:lnSpc>
+                <a:spcPct val="115000"/>
+              </a:lnSpc>
+            </a:pPr>
+            <a:r>
+              <a:rPr sz="1300">
+                <a:solidFill>
+                  <a:srgbClr val="CBD5E1"/>
+                </a:solidFill>
+                <a:latin typeface="Menlo"/>
+              </a:rPr>
+              <a:t>引用: src/auth.py:42-58, middleware.py:11</a:t>
+            </a:r>
+          </a:p>
+          <a:p>
+            <a:pPr>
+              <a:lnSpc>
+                <a:spcPct val="115000"/>
+              </a:lnSpc>
+            </a:pPr>
+            <a:r>
+              <a:rPr sz="1300">
+                <a:solidFill>
+                  <a:srgbClr val="94A3B8"/>
+                </a:solidFill>
+                <a:latin typeface="Menlo"/>
+              </a:rPr>
+              <a:t># 文件+行号引用是交付标准</a:t>
+            </a:r>
+          </a:p>
+        </p:txBody>
+      </p:sp>
+      <p:sp>
+        <p:nvSpPr>
+          <p:cNvPr id="12" name="TextBox 11"/>
+          <p:cNvSpPr txBox="1"/>
+          <p:nvPr/>
+        </p:nvSpPr>
+        <p:spPr>
+          <a:xfrm>
+            <a:off x="10287000" y="6534150"/>
+            <a:ext cx="1619250" cy="266700"/>
           </a:xfrm>
           <a:prstGeom prst="rect">
             <a:avLst/>
@@ -10791,351 +11161,6 @@
               </a:lnSpc>
             </a:pPr>
             <a:r>
-              <a:rPr sz="1100" b="0">
-                <a:solidFill>
-                  <a:srgbClr val="94A3B8"/>
-                </a:solidFill>
-                <a:latin typeface="PingFang SC"/>
-              </a:rPr>
-              <a:t>tests 语料复现</a:t>
-            </a:r>
-          </a:p>
-        </p:txBody>
-      </p:sp>
-      <p:sp>
-        <p:nvSpPr>
-          <p:cNvPr id="6" name="Rounded Rectangle 5"/>
-          <p:cNvSpPr/>
-          <p:nvPr/>
-        </p:nvSpPr>
-        <p:spPr>
-          <a:xfrm>
-            <a:off x="1333500" y="952500"/>
-            <a:ext cx="9525000" cy="5048250"/>
-          </a:xfrm>
-          <a:prstGeom prst="roundRect">
-            <a:avLst>
-              <a:gd name="adj" fmla="val 8000"/>
-            </a:avLst>
-          </a:prstGeom>
-          <a:solidFill>
-            <a:srgbClr val="0D1117"/>
-          </a:solidFill>
-          <a:ln>
-            <a:noFill/>
-          </a:ln>
-          <a:effectLst/>
-        </p:spPr>
-        <p:style>
-          <a:lnRef idx="1">
-            <a:schemeClr val="accent1"/>
-          </a:lnRef>
-          <a:fillRef idx="3">
-            <a:schemeClr val="accent1"/>
-          </a:fillRef>
-          <a:effectRef idx="2">
-            <a:schemeClr val="accent1"/>
-          </a:effectRef>
-          <a:fontRef idx="minor">
-            <a:schemeClr val="lt1"/>
-          </a:fontRef>
-        </p:style>
-        <p:txBody>
-          <a:bodyPr rtlCol="0" anchor="ctr"/>
-          <a:lstStyle/>
-          <a:p>
-            <a:pPr algn="ctr"/>
-          </a:p>
-        </p:txBody>
-      </p:sp>
-      <p:sp>
-        <p:nvSpPr>
-          <p:cNvPr id="7" name="Rectangle 6"/>
-          <p:cNvSpPr/>
-          <p:nvPr/>
-        </p:nvSpPr>
-        <p:spPr>
-          <a:xfrm>
-            <a:off x="1333500" y="952500"/>
-            <a:ext cx="9525000" cy="381000"/>
-          </a:xfrm>
-          <a:prstGeom prst="rect">
-            <a:avLst/>
-          </a:prstGeom>
-          <a:solidFill>
-            <a:srgbClr val="1F2937"/>
-          </a:solidFill>
-          <a:ln>
-            <a:noFill/>
-          </a:ln>
-          <a:effectLst/>
-        </p:spPr>
-        <p:style>
-          <a:lnRef idx="1">
-            <a:schemeClr val="accent1"/>
-          </a:lnRef>
-          <a:fillRef idx="3">
-            <a:schemeClr val="accent1"/>
-          </a:fillRef>
-          <a:effectRef idx="2">
-            <a:schemeClr val="accent1"/>
-          </a:effectRef>
-          <a:fontRef idx="minor">
-            <a:schemeClr val="lt1"/>
-          </a:fontRef>
-        </p:style>
-        <p:txBody>
-          <a:bodyPr rtlCol="0" anchor="ctr"/>
-          <a:lstStyle/>
-          <a:p>
-            <a:pPr algn="ctr"/>
-          </a:p>
-        </p:txBody>
-      </p:sp>
-      <p:sp>
-        <p:nvSpPr>
-          <p:cNvPr id="8" name="Rounded Rectangle 7"/>
-          <p:cNvSpPr/>
-          <p:nvPr/>
-        </p:nvSpPr>
-        <p:spPr>
-          <a:xfrm>
-            <a:off x="1504950" y="1085850"/>
-            <a:ext cx="123825" cy="123825"/>
-          </a:xfrm>
-          <a:prstGeom prst="roundRect">
-            <a:avLst>
-              <a:gd name="adj" fmla="val 8000"/>
-            </a:avLst>
-          </a:prstGeom>
-          <a:solidFill>
-            <a:srgbClr val="F87171"/>
-          </a:solidFill>
-          <a:ln>
-            <a:noFill/>
-          </a:ln>
-          <a:effectLst/>
-        </p:spPr>
-        <p:style>
-          <a:lnRef idx="1">
-            <a:schemeClr val="accent1"/>
-          </a:lnRef>
-          <a:fillRef idx="3">
-            <a:schemeClr val="accent1"/>
-          </a:fillRef>
-          <a:effectRef idx="2">
-            <a:schemeClr val="accent1"/>
-          </a:effectRef>
-          <a:fontRef idx="minor">
-            <a:schemeClr val="lt1"/>
-          </a:fontRef>
-        </p:style>
-        <p:txBody>
-          <a:bodyPr rtlCol="0" anchor="ctr"/>
-          <a:lstStyle/>
-          <a:p>
-            <a:pPr algn="ctr"/>
-          </a:p>
-        </p:txBody>
-      </p:sp>
-      <p:sp>
-        <p:nvSpPr>
-          <p:cNvPr id="9" name="Rounded Rectangle 8"/>
-          <p:cNvSpPr/>
-          <p:nvPr/>
-        </p:nvSpPr>
-        <p:spPr>
-          <a:xfrm>
-            <a:off x="1752600" y="1085850"/>
-            <a:ext cx="123825" cy="123825"/>
-          </a:xfrm>
-          <a:prstGeom prst="roundRect">
-            <a:avLst>
-              <a:gd name="adj" fmla="val 8000"/>
-            </a:avLst>
-          </a:prstGeom>
-          <a:solidFill>
-            <a:srgbClr val="F59E0B"/>
-          </a:solidFill>
-          <a:ln>
-            <a:noFill/>
-          </a:ln>
-          <a:effectLst/>
-        </p:spPr>
-        <p:style>
-          <a:lnRef idx="1">
-            <a:schemeClr val="accent1"/>
-          </a:lnRef>
-          <a:fillRef idx="3">
-            <a:schemeClr val="accent1"/>
-          </a:fillRef>
-          <a:effectRef idx="2">
-            <a:schemeClr val="accent1"/>
-          </a:effectRef>
-          <a:fontRef idx="minor">
-            <a:schemeClr val="lt1"/>
-          </a:fontRef>
-        </p:style>
-        <p:txBody>
-          <a:bodyPr rtlCol="0" anchor="ctr"/>
-          <a:lstStyle/>
-          <a:p>
-            <a:pPr algn="ctr"/>
-          </a:p>
-        </p:txBody>
-      </p:sp>
-      <p:sp>
-        <p:nvSpPr>
-          <p:cNvPr id="10" name="Rounded Rectangle 9"/>
-          <p:cNvSpPr/>
-          <p:nvPr/>
-        </p:nvSpPr>
-        <p:spPr>
-          <a:xfrm>
-            <a:off x="2000250" y="1085850"/>
-            <a:ext cx="123825" cy="123825"/>
-          </a:xfrm>
-          <a:prstGeom prst="roundRect">
-            <a:avLst>
-              <a:gd name="adj" fmla="val 8000"/>
-            </a:avLst>
-          </a:prstGeom>
-          <a:solidFill>
-            <a:srgbClr val="34D399"/>
-          </a:solidFill>
-          <a:ln>
-            <a:noFill/>
-          </a:ln>
-          <a:effectLst/>
-        </p:spPr>
-        <p:style>
-          <a:lnRef idx="1">
-            <a:schemeClr val="accent1"/>
-          </a:lnRef>
-          <a:fillRef idx="3">
-            <a:schemeClr val="accent1"/>
-          </a:fillRef>
-          <a:effectRef idx="2">
-            <a:schemeClr val="accent1"/>
-          </a:effectRef>
-          <a:fontRef idx="minor">
-            <a:schemeClr val="lt1"/>
-          </a:fontRef>
-        </p:style>
-        <p:txBody>
-          <a:bodyPr rtlCol="0" anchor="ctr"/>
-          <a:lstStyle/>
-          <a:p>
-            <a:pPr algn="ctr"/>
-          </a:p>
-        </p:txBody>
-      </p:sp>
-      <p:sp>
-        <p:nvSpPr>
-          <p:cNvPr id="11" name="TextBox 10"/>
-          <p:cNvSpPr txBox="1"/>
-          <p:nvPr/>
-        </p:nvSpPr>
-        <p:spPr>
-          <a:xfrm>
-            <a:off x="2381250" y="952500"/>
-            <a:ext cx="8286750" cy="381000"/>
-          </a:xfrm>
-          <a:prstGeom prst="rect">
-            <a:avLst/>
-          </a:prstGeom>
-          <a:noFill/>
-        </p:spPr>
-        <p:txBody>
-          <a:bodyPr wrap="square" anchor="ctr">
-            <a:spAutoFit/>
-          </a:bodyPr>
-          <a:lstStyle/>
-          <a:p>
-            <a:pPr algn="l">
-              <a:lnSpc>
-                <a:spcPct val="100000"/>
-              </a:lnSpc>
-            </a:pPr>
-            <a:r>
-              <a:rPr sz="1100" b="0">
-                <a:solidFill>
-                  <a:srgbClr val="94A3B8"/>
-                </a:solidFill>
-                <a:latin typeface="PingFang SC"/>
-              </a:rPr>
-              <a:t>terminal — 平台实测</a:t>
-            </a:r>
-          </a:p>
-        </p:txBody>
-      </p:sp>
-      <p:sp>
-        <p:nvSpPr>
-          <p:cNvPr id="12" name="TextBox 11"/>
-          <p:cNvSpPr txBox="1"/>
-          <p:nvPr/>
-        </p:nvSpPr>
-        <p:spPr>
-          <a:xfrm>
-            <a:off x="1562100" y="1485900"/>
-            <a:ext cx="9067800" cy="4381500"/>
-          </a:xfrm>
-          <a:prstGeom prst="rect">
-            <a:avLst/>
-          </a:prstGeom>
-          <a:noFill/>
-        </p:spPr>
-        <p:txBody>
-          <a:bodyPr wrap="square">
-            <a:spAutoFit/>
-          </a:bodyPr>
-          <a:lstStyle/>
-          <a:p>
-            <a:pPr>
-              <a:lnSpc>
-                <a:spcPct val="115000"/>
-              </a:lnSpc>
-            </a:pPr>
-            <a:r>
-              <a:rPr sz="1300">
-                <a:solidFill>
-                  <a:srgbClr val="CBD5E1"/>
-                </a:solidFill>
-                <a:latin typeface="Menlo"/>
-              </a:rPr>
-              <a:t>tests 语料复现</a:t>
-            </a:r>
-          </a:p>
-        </p:txBody>
-      </p:sp>
-      <p:sp>
-        <p:nvSpPr>
-          <p:cNvPr id="13" name="TextBox 12"/>
-          <p:cNvSpPr txBox="1"/>
-          <p:nvPr/>
-        </p:nvSpPr>
-        <p:spPr>
-          <a:xfrm>
-            <a:off x="10287000" y="6534150"/>
-            <a:ext cx="1619250" cy="266700"/>
-          </a:xfrm>
-          <a:prstGeom prst="rect">
-            <a:avLst/>
-          </a:prstGeom>
-          <a:noFill/>
-        </p:spPr>
-        <p:txBody>
-          <a:bodyPr wrap="square" anchor="ctr">
-            <a:spAutoFit/>
-          </a:bodyPr>
-          <a:lstStyle/>
-          <a:p>
-            <a:pPr algn="r">
-              <a:lnSpc>
-                <a:spcPct val="100000"/>
-              </a:lnSpc>
-            </a:pPr>
-            <a:r>
               <a:rPr sz="900" b="0">
                 <a:solidFill>
                   <a:srgbClr val="94A3B8"/>
@@ -11149,7 +11174,7 @@
       </p:sp>
       <p:sp>
         <p:nvSpPr>
-          <p:cNvPr id="14" name="TextBox 13"/>
+          <p:cNvPr id="13" name="TextBox 12"/>
           <p:cNvSpPr txBox="1"/>
           <p:nvPr/>
         </p:nvSpPr>
@@ -14837,21 +14862,391 @@
                 </a:solidFill>
                 <a:latin typeface="PingFang SC"/>
               </a:rPr>
-              <a:t>异常问答实测,Q: 这个 TimeoutError 的根因是什么?;检索: 异常类(2)+历史修复(1);回答: 第三方超时未设+重试缺失;引用: services/pay.py:88, wiki/fixes.md#12;# 记忆与检索联合发力</a:t>
-            </a:r>
-          </a:p>
-        </p:txBody>
-      </p:sp>
-      <p:sp>
-        <p:nvSpPr>
-          <p:cNvPr id="5" name="TextBox 4"/>
+              <a:t>异常问答实测</a:t>
+            </a:r>
+          </a:p>
+        </p:txBody>
+      </p:sp>
+      <p:sp>
+        <p:nvSpPr>
+          <p:cNvPr id="5" name="Rounded Rectangle 4"/>
+          <p:cNvSpPr/>
+          <p:nvPr/>
+        </p:nvSpPr>
+        <p:spPr>
+          <a:xfrm>
+            <a:off x="1333500" y="1047750"/>
+            <a:ext cx="9525000" cy="2667000"/>
+          </a:xfrm>
+          <a:prstGeom prst="roundRect">
+            <a:avLst>
+              <a:gd name="adj" fmla="val 8000"/>
+            </a:avLst>
+          </a:prstGeom>
+          <a:solidFill>
+            <a:srgbClr val="0D1117"/>
+          </a:solidFill>
+          <a:ln>
+            <a:noFill/>
+          </a:ln>
+          <a:effectLst/>
+        </p:spPr>
+        <p:style>
+          <a:lnRef idx="1">
+            <a:schemeClr val="accent1"/>
+          </a:lnRef>
+          <a:fillRef idx="3">
+            <a:schemeClr val="accent1"/>
+          </a:fillRef>
+          <a:effectRef idx="2">
+            <a:schemeClr val="accent1"/>
+          </a:effectRef>
+          <a:fontRef idx="minor">
+            <a:schemeClr val="lt1"/>
+          </a:fontRef>
+        </p:style>
+        <p:txBody>
+          <a:bodyPr rtlCol="0" anchor="ctr"/>
+          <a:lstStyle/>
+          <a:p>
+            <a:pPr algn="ctr"/>
+          </a:p>
+        </p:txBody>
+      </p:sp>
+      <p:sp>
+        <p:nvSpPr>
+          <p:cNvPr id="6" name="Rectangle 5"/>
+          <p:cNvSpPr/>
+          <p:nvPr/>
+        </p:nvSpPr>
+        <p:spPr>
+          <a:xfrm>
+            <a:off x="1333500" y="1047750"/>
+            <a:ext cx="9525000" cy="381000"/>
+          </a:xfrm>
+          <a:prstGeom prst="rect">
+            <a:avLst/>
+          </a:prstGeom>
+          <a:solidFill>
+            <a:srgbClr val="1F2937"/>
+          </a:solidFill>
+          <a:ln>
+            <a:noFill/>
+          </a:ln>
+          <a:effectLst/>
+        </p:spPr>
+        <p:style>
+          <a:lnRef idx="1">
+            <a:schemeClr val="accent1"/>
+          </a:lnRef>
+          <a:fillRef idx="3">
+            <a:schemeClr val="accent1"/>
+          </a:fillRef>
+          <a:effectRef idx="2">
+            <a:schemeClr val="accent1"/>
+          </a:effectRef>
+          <a:fontRef idx="minor">
+            <a:schemeClr val="lt1"/>
+          </a:fontRef>
+        </p:style>
+        <p:txBody>
+          <a:bodyPr rtlCol="0" anchor="ctr"/>
+          <a:lstStyle/>
+          <a:p>
+            <a:pPr algn="ctr"/>
+          </a:p>
+        </p:txBody>
+      </p:sp>
+      <p:sp>
+        <p:nvSpPr>
+          <p:cNvPr id="7" name="Rounded Rectangle 6"/>
+          <p:cNvSpPr/>
+          <p:nvPr/>
+        </p:nvSpPr>
+        <p:spPr>
+          <a:xfrm>
+            <a:off x="1504950" y="1181100"/>
+            <a:ext cx="123825" cy="123825"/>
+          </a:xfrm>
+          <a:prstGeom prst="roundRect">
+            <a:avLst>
+              <a:gd name="adj" fmla="val 8000"/>
+            </a:avLst>
+          </a:prstGeom>
+          <a:solidFill>
+            <a:srgbClr val="F87171"/>
+          </a:solidFill>
+          <a:ln>
+            <a:noFill/>
+          </a:ln>
+          <a:effectLst/>
+        </p:spPr>
+        <p:style>
+          <a:lnRef idx="1">
+            <a:schemeClr val="accent1"/>
+          </a:lnRef>
+          <a:fillRef idx="3">
+            <a:schemeClr val="accent1"/>
+          </a:fillRef>
+          <a:effectRef idx="2">
+            <a:schemeClr val="accent1"/>
+          </a:effectRef>
+          <a:fontRef idx="minor">
+            <a:schemeClr val="lt1"/>
+          </a:fontRef>
+        </p:style>
+        <p:txBody>
+          <a:bodyPr rtlCol="0" anchor="ctr"/>
+          <a:lstStyle/>
+          <a:p>
+            <a:pPr algn="ctr"/>
+          </a:p>
+        </p:txBody>
+      </p:sp>
+      <p:sp>
+        <p:nvSpPr>
+          <p:cNvPr id="8" name="Rounded Rectangle 7"/>
+          <p:cNvSpPr/>
+          <p:nvPr/>
+        </p:nvSpPr>
+        <p:spPr>
+          <a:xfrm>
+            <a:off x="1752600" y="1181100"/>
+            <a:ext cx="123825" cy="123825"/>
+          </a:xfrm>
+          <a:prstGeom prst="roundRect">
+            <a:avLst>
+              <a:gd name="adj" fmla="val 8000"/>
+            </a:avLst>
+          </a:prstGeom>
+          <a:solidFill>
+            <a:srgbClr val="F59E0B"/>
+          </a:solidFill>
+          <a:ln>
+            <a:noFill/>
+          </a:ln>
+          <a:effectLst/>
+        </p:spPr>
+        <p:style>
+          <a:lnRef idx="1">
+            <a:schemeClr val="accent1"/>
+          </a:lnRef>
+          <a:fillRef idx="3">
+            <a:schemeClr val="accent1"/>
+          </a:fillRef>
+          <a:effectRef idx="2">
+            <a:schemeClr val="accent1"/>
+          </a:effectRef>
+          <a:fontRef idx="minor">
+            <a:schemeClr val="lt1"/>
+          </a:fontRef>
+        </p:style>
+        <p:txBody>
+          <a:bodyPr rtlCol="0" anchor="ctr"/>
+          <a:lstStyle/>
+          <a:p>
+            <a:pPr algn="ctr"/>
+          </a:p>
+        </p:txBody>
+      </p:sp>
+      <p:sp>
+        <p:nvSpPr>
+          <p:cNvPr id="9" name="Rounded Rectangle 8"/>
+          <p:cNvSpPr/>
+          <p:nvPr/>
+        </p:nvSpPr>
+        <p:spPr>
+          <a:xfrm>
+            <a:off x="2000250" y="1181100"/>
+            <a:ext cx="123825" cy="123825"/>
+          </a:xfrm>
+          <a:prstGeom prst="roundRect">
+            <a:avLst>
+              <a:gd name="adj" fmla="val 8000"/>
+            </a:avLst>
+          </a:prstGeom>
+          <a:solidFill>
+            <a:srgbClr val="34D399"/>
+          </a:solidFill>
+          <a:ln>
+            <a:noFill/>
+          </a:ln>
+          <a:effectLst/>
+        </p:spPr>
+        <p:style>
+          <a:lnRef idx="1">
+            <a:schemeClr val="accent1"/>
+          </a:lnRef>
+          <a:fillRef idx="3">
+            <a:schemeClr val="accent1"/>
+          </a:fillRef>
+          <a:effectRef idx="2">
+            <a:schemeClr val="accent1"/>
+          </a:effectRef>
+          <a:fontRef idx="minor">
+            <a:schemeClr val="lt1"/>
+          </a:fontRef>
+        </p:style>
+        <p:txBody>
+          <a:bodyPr rtlCol="0" anchor="ctr"/>
+          <a:lstStyle/>
+          <a:p>
+            <a:pPr algn="ctr"/>
+          </a:p>
+        </p:txBody>
+      </p:sp>
+      <p:sp>
+        <p:nvSpPr>
+          <p:cNvPr id="10" name="TextBox 9"/>
           <p:cNvSpPr txBox="1"/>
           <p:nvPr/>
         </p:nvSpPr>
         <p:spPr>
           <a:xfrm>
-            <a:off x="9334500" y="0"/>
-            <a:ext cx="2667000" cy="704850"/>
+            <a:off x="2381250" y="1047750"/>
+            <a:ext cx="8286750" cy="381000"/>
+          </a:xfrm>
+          <a:prstGeom prst="rect">
+            <a:avLst/>
+          </a:prstGeom>
+          <a:noFill/>
+        </p:spPr>
+        <p:txBody>
+          <a:bodyPr wrap="square" anchor="ctr">
+            <a:spAutoFit/>
+          </a:bodyPr>
+          <a:lstStyle/>
+          <a:p>
+            <a:pPr algn="l">
+              <a:lnSpc>
+                <a:spcPct val="100000"/>
+              </a:lnSpc>
+            </a:pPr>
+            <a:r>
+              <a:rPr sz="1100" b="0">
+                <a:solidFill>
+                  <a:srgbClr val="94A3B8"/>
+                </a:solidFill>
+                <a:latin typeface="PingFang SC"/>
+              </a:rPr>
+              <a:t>terminal — 平台实测</a:t>
+            </a:r>
+          </a:p>
+        </p:txBody>
+      </p:sp>
+      <p:sp>
+        <p:nvSpPr>
+          <p:cNvPr id="11" name="TextBox 10"/>
+          <p:cNvSpPr txBox="1"/>
+          <p:nvPr/>
+        </p:nvSpPr>
+        <p:spPr>
+          <a:xfrm>
+            <a:off x="1562100" y="1581150"/>
+            <a:ext cx="9067800" cy="2000250"/>
+          </a:xfrm>
+          <a:prstGeom prst="rect">
+            <a:avLst/>
+          </a:prstGeom>
+          <a:noFill/>
+        </p:spPr>
+        <p:txBody>
+          <a:bodyPr wrap="square">
+            <a:spAutoFit/>
+          </a:bodyPr>
+          <a:lstStyle/>
+          <a:p>
+            <a:pPr>
+              <a:lnSpc>
+                <a:spcPct val="115000"/>
+              </a:lnSpc>
+            </a:pPr>
+            <a:r>
+              <a:rPr sz="1300">
+                <a:solidFill>
+                  <a:srgbClr val="CBD5E1"/>
+                </a:solidFill>
+                <a:latin typeface="Menlo"/>
+              </a:rPr>
+              <a:t>Q: 这个 TimeoutError 的根因是什么?</a:t>
+            </a:r>
+          </a:p>
+          <a:p>
+            <a:pPr>
+              <a:lnSpc>
+                <a:spcPct val="115000"/>
+              </a:lnSpc>
+            </a:pPr>
+            <a:r>
+              <a:rPr sz="1300">
+                <a:solidFill>
+                  <a:srgbClr val="CBD5E1"/>
+                </a:solidFill>
+                <a:latin typeface="Menlo"/>
+              </a:rPr>
+              <a:t>检索: 异常类(2)+历史修复(1)</a:t>
+            </a:r>
+          </a:p>
+          <a:p>
+            <a:pPr>
+              <a:lnSpc>
+                <a:spcPct val="115000"/>
+              </a:lnSpc>
+            </a:pPr>
+            <a:r>
+              <a:rPr sz="1300">
+                <a:solidFill>
+                  <a:srgbClr val="CBD5E1"/>
+                </a:solidFill>
+                <a:latin typeface="Menlo"/>
+              </a:rPr>
+              <a:t>回答: 第三方超时未设+重试缺失</a:t>
+            </a:r>
+          </a:p>
+          <a:p>
+            <a:pPr>
+              <a:lnSpc>
+                <a:spcPct val="115000"/>
+              </a:lnSpc>
+            </a:pPr>
+            <a:r>
+              <a:rPr sz="1300">
+                <a:solidFill>
+                  <a:srgbClr val="CBD5E1"/>
+                </a:solidFill>
+                <a:latin typeface="Menlo"/>
+              </a:rPr>
+              <a:t>引用: services/pay.py:88, wiki/fixes.md#12</a:t>
+            </a:r>
+          </a:p>
+          <a:p>
+            <a:pPr>
+              <a:lnSpc>
+                <a:spcPct val="115000"/>
+              </a:lnSpc>
+            </a:pPr>
+            <a:r>
+              <a:rPr sz="1300">
+                <a:solidFill>
+                  <a:srgbClr val="94A3B8"/>
+                </a:solidFill>
+                <a:latin typeface="Menlo"/>
+              </a:rPr>
+              <a:t># 记忆与检索联合发力</a:t>
+            </a:r>
+          </a:p>
+        </p:txBody>
+      </p:sp>
+      <p:sp>
+        <p:nvSpPr>
+          <p:cNvPr id="12" name="TextBox 11"/>
+          <p:cNvSpPr txBox="1"/>
+          <p:nvPr/>
+        </p:nvSpPr>
+        <p:spPr>
+          <a:xfrm>
+            <a:off x="10287000" y="6534150"/>
+            <a:ext cx="1619250" cy="266700"/>
           </a:xfrm>
           <a:prstGeom prst="rect">
             <a:avLst/>
@@ -14870,351 +15265,6 @@
               </a:lnSpc>
             </a:pPr>
             <a:r>
-              <a:rPr sz="1100" b="0">
-                <a:solidFill>
-                  <a:srgbClr val="94A3B8"/>
-                </a:solidFill>
-                <a:latin typeface="PingFang SC"/>
-              </a:rPr>
-              <a:t>tests 语料</a:t>
-            </a:r>
-          </a:p>
-        </p:txBody>
-      </p:sp>
-      <p:sp>
-        <p:nvSpPr>
-          <p:cNvPr id="6" name="Rounded Rectangle 5"/>
-          <p:cNvSpPr/>
-          <p:nvPr/>
-        </p:nvSpPr>
-        <p:spPr>
-          <a:xfrm>
-            <a:off x="1333500" y="952500"/>
-            <a:ext cx="9525000" cy="5048250"/>
-          </a:xfrm>
-          <a:prstGeom prst="roundRect">
-            <a:avLst>
-              <a:gd name="adj" fmla="val 8000"/>
-            </a:avLst>
-          </a:prstGeom>
-          <a:solidFill>
-            <a:srgbClr val="0D1117"/>
-          </a:solidFill>
-          <a:ln>
-            <a:noFill/>
-          </a:ln>
-          <a:effectLst/>
-        </p:spPr>
-        <p:style>
-          <a:lnRef idx="1">
-            <a:schemeClr val="accent1"/>
-          </a:lnRef>
-          <a:fillRef idx="3">
-            <a:schemeClr val="accent1"/>
-          </a:fillRef>
-          <a:effectRef idx="2">
-            <a:schemeClr val="accent1"/>
-          </a:effectRef>
-          <a:fontRef idx="minor">
-            <a:schemeClr val="lt1"/>
-          </a:fontRef>
-        </p:style>
-        <p:txBody>
-          <a:bodyPr rtlCol="0" anchor="ctr"/>
-          <a:lstStyle/>
-          <a:p>
-            <a:pPr algn="ctr"/>
-          </a:p>
-        </p:txBody>
-      </p:sp>
-      <p:sp>
-        <p:nvSpPr>
-          <p:cNvPr id="7" name="Rectangle 6"/>
-          <p:cNvSpPr/>
-          <p:nvPr/>
-        </p:nvSpPr>
-        <p:spPr>
-          <a:xfrm>
-            <a:off x="1333500" y="952500"/>
-            <a:ext cx="9525000" cy="381000"/>
-          </a:xfrm>
-          <a:prstGeom prst="rect">
-            <a:avLst/>
-          </a:prstGeom>
-          <a:solidFill>
-            <a:srgbClr val="1F2937"/>
-          </a:solidFill>
-          <a:ln>
-            <a:noFill/>
-          </a:ln>
-          <a:effectLst/>
-        </p:spPr>
-        <p:style>
-          <a:lnRef idx="1">
-            <a:schemeClr val="accent1"/>
-          </a:lnRef>
-          <a:fillRef idx="3">
-            <a:schemeClr val="accent1"/>
-          </a:fillRef>
-          <a:effectRef idx="2">
-            <a:schemeClr val="accent1"/>
-          </a:effectRef>
-          <a:fontRef idx="minor">
-            <a:schemeClr val="lt1"/>
-          </a:fontRef>
-        </p:style>
-        <p:txBody>
-          <a:bodyPr rtlCol="0" anchor="ctr"/>
-          <a:lstStyle/>
-          <a:p>
-            <a:pPr algn="ctr"/>
-          </a:p>
-        </p:txBody>
-      </p:sp>
-      <p:sp>
-        <p:nvSpPr>
-          <p:cNvPr id="8" name="Rounded Rectangle 7"/>
-          <p:cNvSpPr/>
-          <p:nvPr/>
-        </p:nvSpPr>
-        <p:spPr>
-          <a:xfrm>
-            <a:off x="1504950" y="1085850"/>
-            <a:ext cx="123825" cy="123825"/>
-          </a:xfrm>
-          <a:prstGeom prst="roundRect">
-            <a:avLst>
-              <a:gd name="adj" fmla="val 8000"/>
-            </a:avLst>
-          </a:prstGeom>
-          <a:solidFill>
-            <a:srgbClr val="F87171"/>
-          </a:solidFill>
-          <a:ln>
-            <a:noFill/>
-          </a:ln>
-          <a:effectLst/>
-        </p:spPr>
-        <p:style>
-          <a:lnRef idx="1">
-            <a:schemeClr val="accent1"/>
-          </a:lnRef>
-          <a:fillRef idx="3">
-            <a:schemeClr val="accent1"/>
-          </a:fillRef>
-          <a:effectRef idx="2">
-            <a:schemeClr val="accent1"/>
-          </a:effectRef>
-          <a:fontRef idx="minor">
-            <a:schemeClr val="lt1"/>
-          </a:fontRef>
-        </p:style>
-        <p:txBody>
-          <a:bodyPr rtlCol="0" anchor="ctr"/>
-          <a:lstStyle/>
-          <a:p>
-            <a:pPr algn="ctr"/>
-          </a:p>
-        </p:txBody>
-      </p:sp>
-      <p:sp>
-        <p:nvSpPr>
-          <p:cNvPr id="9" name="Rounded Rectangle 8"/>
-          <p:cNvSpPr/>
-          <p:nvPr/>
-        </p:nvSpPr>
-        <p:spPr>
-          <a:xfrm>
-            <a:off x="1752600" y="1085850"/>
-            <a:ext cx="123825" cy="123825"/>
-          </a:xfrm>
-          <a:prstGeom prst="roundRect">
-            <a:avLst>
-              <a:gd name="adj" fmla="val 8000"/>
-            </a:avLst>
-          </a:prstGeom>
-          <a:solidFill>
-            <a:srgbClr val="F59E0B"/>
-          </a:solidFill>
-          <a:ln>
-            <a:noFill/>
-          </a:ln>
-          <a:effectLst/>
-        </p:spPr>
-        <p:style>
-          <a:lnRef idx="1">
-            <a:schemeClr val="accent1"/>
-          </a:lnRef>
-          <a:fillRef idx="3">
-            <a:schemeClr val="accent1"/>
-          </a:fillRef>
-          <a:effectRef idx="2">
-            <a:schemeClr val="accent1"/>
-          </a:effectRef>
-          <a:fontRef idx="minor">
-            <a:schemeClr val="lt1"/>
-          </a:fontRef>
-        </p:style>
-        <p:txBody>
-          <a:bodyPr rtlCol="0" anchor="ctr"/>
-          <a:lstStyle/>
-          <a:p>
-            <a:pPr algn="ctr"/>
-          </a:p>
-        </p:txBody>
-      </p:sp>
-      <p:sp>
-        <p:nvSpPr>
-          <p:cNvPr id="10" name="Rounded Rectangle 9"/>
-          <p:cNvSpPr/>
-          <p:nvPr/>
-        </p:nvSpPr>
-        <p:spPr>
-          <a:xfrm>
-            <a:off x="2000250" y="1085850"/>
-            <a:ext cx="123825" cy="123825"/>
-          </a:xfrm>
-          <a:prstGeom prst="roundRect">
-            <a:avLst>
-              <a:gd name="adj" fmla="val 8000"/>
-            </a:avLst>
-          </a:prstGeom>
-          <a:solidFill>
-            <a:srgbClr val="34D399"/>
-          </a:solidFill>
-          <a:ln>
-            <a:noFill/>
-          </a:ln>
-          <a:effectLst/>
-        </p:spPr>
-        <p:style>
-          <a:lnRef idx="1">
-            <a:schemeClr val="accent1"/>
-          </a:lnRef>
-          <a:fillRef idx="3">
-            <a:schemeClr val="accent1"/>
-          </a:fillRef>
-          <a:effectRef idx="2">
-            <a:schemeClr val="accent1"/>
-          </a:effectRef>
-          <a:fontRef idx="minor">
-            <a:schemeClr val="lt1"/>
-          </a:fontRef>
-        </p:style>
-        <p:txBody>
-          <a:bodyPr rtlCol="0" anchor="ctr"/>
-          <a:lstStyle/>
-          <a:p>
-            <a:pPr algn="ctr"/>
-          </a:p>
-        </p:txBody>
-      </p:sp>
-      <p:sp>
-        <p:nvSpPr>
-          <p:cNvPr id="11" name="TextBox 10"/>
-          <p:cNvSpPr txBox="1"/>
-          <p:nvPr/>
-        </p:nvSpPr>
-        <p:spPr>
-          <a:xfrm>
-            <a:off x="2381250" y="952500"/>
-            <a:ext cx="8286750" cy="381000"/>
-          </a:xfrm>
-          <a:prstGeom prst="rect">
-            <a:avLst/>
-          </a:prstGeom>
-          <a:noFill/>
-        </p:spPr>
-        <p:txBody>
-          <a:bodyPr wrap="square" anchor="ctr">
-            <a:spAutoFit/>
-          </a:bodyPr>
-          <a:lstStyle/>
-          <a:p>
-            <a:pPr algn="l">
-              <a:lnSpc>
-                <a:spcPct val="100000"/>
-              </a:lnSpc>
-            </a:pPr>
-            <a:r>
-              <a:rPr sz="1100" b="0">
-                <a:solidFill>
-                  <a:srgbClr val="94A3B8"/>
-                </a:solidFill>
-                <a:latin typeface="PingFang SC"/>
-              </a:rPr>
-              <a:t>terminal — 平台实测</a:t>
-            </a:r>
-          </a:p>
-        </p:txBody>
-      </p:sp>
-      <p:sp>
-        <p:nvSpPr>
-          <p:cNvPr id="12" name="TextBox 11"/>
-          <p:cNvSpPr txBox="1"/>
-          <p:nvPr/>
-        </p:nvSpPr>
-        <p:spPr>
-          <a:xfrm>
-            <a:off x="1562100" y="1485900"/>
-            <a:ext cx="9067800" cy="4381500"/>
-          </a:xfrm>
-          <a:prstGeom prst="rect">
-            <a:avLst/>
-          </a:prstGeom>
-          <a:noFill/>
-        </p:spPr>
-        <p:txBody>
-          <a:bodyPr wrap="square">
-            <a:spAutoFit/>
-          </a:bodyPr>
-          <a:lstStyle/>
-          <a:p>
-            <a:pPr>
-              <a:lnSpc>
-                <a:spcPct val="115000"/>
-              </a:lnSpc>
-            </a:pPr>
-            <a:r>
-              <a:rPr sz="1300">
-                <a:solidFill>
-                  <a:srgbClr val="CBD5E1"/>
-                </a:solidFill>
-                <a:latin typeface="Menlo"/>
-              </a:rPr>
-              <a:t>tests 语料</a:t>
-            </a:r>
-          </a:p>
-        </p:txBody>
-      </p:sp>
-      <p:sp>
-        <p:nvSpPr>
-          <p:cNvPr id="13" name="TextBox 12"/>
-          <p:cNvSpPr txBox="1"/>
-          <p:nvPr/>
-        </p:nvSpPr>
-        <p:spPr>
-          <a:xfrm>
-            <a:off x="10287000" y="6534150"/>
-            <a:ext cx="1619250" cy="266700"/>
-          </a:xfrm>
-          <a:prstGeom prst="rect">
-            <a:avLst/>
-          </a:prstGeom>
-          <a:noFill/>
-        </p:spPr>
-        <p:txBody>
-          <a:bodyPr wrap="square" anchor="ctr">
-            <a:spAutoFit/>
-          </a:bodyPr>
-          <a:lstStyle/>
-          <a:p>
-            <a:pPr algn="r">
-              <a:lnSpc>
-                <a:spcPct val="100000"/>
-              </a:lnSpc>
-            </a:pPr>
-            <a:r>
               <a:rPr sz="900" b="0">
                 <a:solidFill>
                   <a:srgbClr val="94A3B8"/>
@@ -15228,7 +15278,7 @@
       </p:sp>
       <p:sp>
         <p:nvSpPr>
-          <p:cNvPr id="14" name="TextBox 13"/>
+          <p:cNvPr id="13" name="TextBox 12"/>
           <p:cNvSpPr txBox="1"/>
           <p:nvPr/>
         </p:nvSpPr>
@@ -17547,7 +17597,7 @@
                 </a:solidFill>
                 <a:latin typeface="PingFang SC"/>
               </a:rPr>
-              <a:t>5. 秒级完成|提交即索引,消灭滞后</a:t>
+              <a:t>5. 秒级完成</a:t>
             </a:r>
           </a:p>
         </p:txBody>
@@ -21389,7 +21439,7 @@
                 </a:solidFill>
                 <a:latin typeface="PingFang SC"/>
               </a:rPr>
-              <a:t>无证据结论占比|管线每次变更全量回归</a:t>
+              <a:t>无证据结论占比</a:t>
             </a:r>
           </a:p>
         </p:txBody>
@@ -25109,8 +25159,8 @@
         </p:blipFill>
         <p:spPr>
           <a:xfrm>
-            <a:off x="1026566" y="762000"/>
-            <a:ext cx="10138867" cy="5760720"/>
+            <a:off x="1313515" y="762000"/>
+            <a:ext cx="9564969" cy="5760720"/>
           </a:xfrm>
           <a:prstGeom prst="rect">
             <a:avLst/>
@@ -28476,7 +28526,7 @@
                 </a:solidFill>
                 <a:latin typeface="PingFang SC"/>
               </a:rPr>
-              <a:t>MemoryStore 三层已对齐|LangSmith/AgentOps=记忆可观测</a:t>
+              <a:t>MemoryStore 三层已对齐</a:t>
             </a:r>
           </a:p>
         </p:txBody>
